--- a/u08a_binaryTrees_BSTs/notes/_a - Classifying binary trees and Tree Traversal.pptx
+++ b/u08a_binaryTrees_BSTs/notes/_a - Classifying binary trees and Tree Traversal.pptx
@@ -2924,10 +2924,10 @@
           </a:ln>
           <a:extLst>
             <a:ext uri="{FAA26D3D-D897-4be2-8F04-BA451C77F1D7}">
-              <ma14:placeholderFlag xmlns:ma14="http://schemas.microsoft.com/office/mac/drawingml/2011/main" xmlns="" val="1"/>
+              <ma14:placeholderFlag xmlns="" xmlns:ma14="http://schemas.microsoft.com/office/mac/drawingml/2011/main" val="1"/>
             </a:ext>
             <a:ext uri="{909E8E84-426E-40dd-AFC4-6F175D3DCCD1}">
-              <a14:hiddenFill xmlns="" xmlns:a14="http://schemas.microsoft.com/office/drawing/2010/main">
+              <a14:hiddenFill xmlns:a14="http://schemas.microsoft.com/office/drawing/2010/main" xmlns="">
                 <a:solidFill>
                   <a:srgbClr val="FFFFFF"/>
                 </a:solidFill>
@@ -2950,17 +2950,17 @@
           <a:noFill/>
           <a:extLst>
             <a:ext uri="{FAA26D3D-D897-4be2-8F04-BA451C77F1D7}">
-              <ma14:placeholderFlag xmlns:ma14="http://schemas.microsoft.com/office/mac/drawingml/2011/main" xmlns="" val="1"/>
+              <ma14:placeholderFlag xmlns="" xmlns:ma14="http://schemas.microsoft.com/office/mac/drawingml/2011/main" val="1"/>
             </a:ext>
             <a:ext uri="{909E8E84-426E-40dd-AFC4-6F175D3DCCD1}">
-              <a14:hiddenFill xmlns="" xmlns:a14="http://schemas.microsoft.com/office/drawing/2010/main">
+              <a14:hiddenFill xmlns:a14="http://schemas.microsoft.com/office/drawing/2010/main" xmlns="">
                 <a:solidFill>
                   <a:srgbClr val="FFFFFF"/>
                 </a:solidFill>
               </a14:hiddenFill>
             </a:ext>
             <a:ext uri="{91240B29-F687-4f45-9708-019B960494DF}">
-              <a14:hiddenLine xmlns="" xmlns:a14="http://schemas.microsoft.com/office/drawing/2010/main" w="9525">
+              <a14:hiddenLine xmlns:a14="http://schemas.microsoft.com/office/drawing/2010/main" xmlns="" w="9525">
                 <a:solidFill>
                   <a:srgbClr val="000000"/>
                 </a:solidFill>
@@ -2999,14 +2999,14 @@
           <a:noFill/>
           <a:extLst>
             <a:ext uri="{909E8E84-426E-40dd-AFC4-6F175D3DCCD1}">
-              <a14:hiddenFill xmlns="" xmlns:a14="http://schemas.microsoft.com/office/drawing/2010/main">
+              <a14:hiddenFill xmlns:a14="http://schemas.microsoft.com/office/drawing/2010/main" xmlns="">
                 <a:solidFill>
                   <a:srgbClr val="FFFFFF"/>
                 </a:solidFill>
               </a14:hiddenFill>
             </a:ext>
             <a:ext uri="{91240B29-F687-4f45-9708-019B960494DF}">
-              <a14:hiddenLine xmlns="" xmlns:a14="http://schemas.microsoft.com/office/drawing/2010/main" w="9525">
+              <a14:hiddenLine xmlns:a14="http://schemas.microsoft.com/office/drawing/2010/main" xmlns="" w="9525">
                 <a:solidFill>
                   <a:srgbClr val="000000"/>
                 </a:solidFill>
@@ -3197,10 +3197,10 @@
           </a:ln>
           <a:extLst>
             <a:ext uri="{FAA26D3D-D897-4be2-8F04-BA451C77F1D7}">
-              <ma14:placeholderFlag xmlns:ma14="http://schemas.microsoft.com/office/mac/drawingml/2011/main" xmlns="" val="1"/>
+              <ma14:placeholderFlag xmlns="" xmlns:ma14="http://schemas.microsoft.com/office/mac/drawingml/2011/main" val="1"/>
             </a:ext>
             <a:ext uri="{909E8E84-426E-40dd-AFC4-6F175D3DCCD1}">
-              <a14:hiddenFill xmlns="" xmlns:a14="http://schemas.microsoft.com/office/drawing/2010/main">
+              <a14:hiddenFill xmlns:a14="http://schemas.microsoft.com/office/drawing/2010/main" xmlns="">
                 <a:solidFill>
                   <a:srgbClr val="FFFFFF"/>
                 </a:solidFill>
@@ -3223,17 +3223,17 @@
           <a:noFill/>
           <a:extLst>
             <a:ext uri="{FAA26D3D-D897-4be2-8F04-BA451C77F1D7}">
-              <ma14:placeholderFlag xmlns:ma14="http://schemas.microsoft.com/office/mac/drawingml/2011/main" xmlns="" val="1"/>
+              <ma14:placeholderFlag xmlns="" xmlns:ma14="http://schemas.microsoft.com/office/mac/drawingml/2011/main" val="1"/>
             </a:ext>
             <a:ext uri="{909E8E84-426E-40dd-AFC4-6F175D3DCCD1}">
-              <a14:hiddenFill xmlns="" xmlns:a14="http://schemas.microsoft.com/office/drawing/2010/main">
+              <a14:hiddenFill xmlns:a14="http://schemas.microsoft.com/office/drawing/2010/main" xmlns="">
                 <a:solidFill>
                   <a:srgbClr val="FFFFFF"/>
                 </a:solidFill>
               </a14:hiddenFill>
             </a:ext>
             <a:ext uri="{91240B29-F687-4f45-9708-019B960494DF}">
-              <a14:hiddenLine xmlns="" xmlns:a14="http://schemas.microsoft.com/office/drawing/2010/main" w="9525">
+              <a14:hiddenLine xmlns:a14="http://schemas.microsoft.com/office/drawing/2010/main" xmlns="" w="9525">
                 <a:solidFill>
                   <a:srgbClr val="000000"/>
                 </a:solidFill>
@@ -3272,14 +3272,14 @@
           <a:noFill/>
           <a:extLst>
             <a:ext uri="{909E8E84-426E-40dd-AFC4-6F175D3DCCD1}">
-              <a14:hiddenFill xmlns="" xmlns:a14="http://schemas.microsoft.com/office/drawing/2010/main">
+              <a14:hiddenFill xmlns:a14="http://schemas.microsoft.com/office/drawing/2010/main" xmlns="">
                 <a:solidFill>
                   <a:srgbClr val="FFFFFF"/>
                 </a:solidFill>
               </a14:hiddenFill>
             </a:ext>
             <a:ext uri="{91240B29-F687-4f45-9708-019B960494DF}">
-              <a14:hiddenLine xmlns="" xmlns:a14="http://schemas.microsoft.com/office/drawing/2010/main" w="9525">
+              <a14:hiddenLine xmlns:a14="http://schemas.microsoft.com/office/drawing/2010/main" xmlns="" w="9525">
                 <a:solidFill>
                   <a:srgbClr val="000000"/>
                 </a:solidFill>
@@ -3470,10 +3470,10 @@
           </a:ln>
           <a:extLst>
             <a:ext uri="{FAA26D3D-D897-4be2-8F04-BA451C77F1D7}">
-              <ma14:placeholderFlag xmlns:ma14="http://schemas.microsoft.com/office/mac/drawingml/2011/main" xmlns="" val="1"/>
+              <ma14:placeholderFlag xmlns="" xmlns:ma14="http://schemas.microsoft.com/office/mac/drawingml/2011/main" val="1"/>
             </a:ext>
             <a:ext uri="{909E8E84-426E-40dd-AFC4-6F175D3DCCD1}">
-              <a14:hiddenFill xmlns="" xmlns:a14="http://schemas.microsoft.com/office/drawing/2010/main">
+              <a14:hiddenFill xmlns:a14="http://schemas.microsoft.com/office/drawing/2010/main" xmlns="">
                 <a:solidFill>
                   <a:srgbClr val="FFFFFF"/>
                 </a:solidFill>
@@ -3496,17 +3496,17 @@
           <a:noFill/>
           <a:extLst>
             <a:ext uri="{FAA26D3D-D897-4be2-8F04-BA451C77F1D7}">
-              <ma14:placeholderFlag xmlns:ma14="http://schemas.microsoft.com/office/mac/drawingml/2011/main" xmlns="" val="1"/>
+              <ma14:placeholderFlag xmlns="" xmlns:ma14="http://schemas.microsoft.com/office/mac/drawingml/2011/main" val="1"/>
             </a:ext>
             <a:ext uri="{909E8E84-426E-40dd-AFC4-6F175D3DCCD1}">
-              <a14:hiddenFill xmlns="" xmlns:a14="http://schemas.microsoft.com/office/drawing/2010/main">
+              <a14:hiddenFill xmlns:a14="http://schemas.microsoft.com/office/drawing/2010/main" xmlns="">
                 <a:solidFill>
                   <a:srgbClr val="FFFFFF"/>
                 </a:solidFill>
               </a14:hiddenFill>
             </a:ext>
             <a:ext uri="{91240B29-F687-4f45-9708-019B960494DF}">
-              <a14:hiddenLine xmlns="" xmlns:a14="http://schemas.microsoft.com/office/drawing/2010/main" w="9525">
+              <a14:hiddenLine xmlns:a14="http://schemas.microsoft.com/office/drawing/2010/main" xmlns="" w="9525">
                 <a:solidFill>
                   <a:srgbClr val="000000"/>
                 </a:solidFill>
@@ -3545,14 +3545,14 @@
           <a:noFill/>
           <a:extLst>
             <a:ext uri="{909E8E84-426E-40dd-AFC4-6F175D3DCCD1}">
-              <a14:hiddenFill xmlns="" xmlns:a14="http://schemas.microsoft.com/office/drawing/2010/main">
+              <a14:hiddenFill xmlns:a14="http://schemas.microsoft.com/office/drawing/2010/main" xmlns="">
                 <a:solidFill>
                   <a:srgbClr val="FFFFFF"/>
                 </a:solidFill>
               </a14:hiddenFill>
             </a:ext>
             <a:ext uri="{91240B29-F687-4f45-9708-019B960494DF}">
-              <a14:hiddenLine xmlns="" xmlns:a14="http://schemas.microsoft.com/office/drawing/2010/main" w="9525">
+              <a14:hiddenLine xmlns:a14="http://schemas.microsoft.com/office/drawing/2010/main" xmlns="" w="9525">
                 <a:solidFill>
                   <a:srgbClr val="000000"/>
                 </a:solidFill>
@@ -3743,10 +3743,10 @@
           </a:ln>
           <a:extLst>
             <a:ext uri="{FAA26D3D-D897-4be2-8F04-BA451C77F1D7}">
-              <ma14:placeholderFlag xmlns:ma14="http://schemas.microsoft.com/office/mac/drawingml/2011/main" xmlns="" val="1"/>
+              <ma14:placeholderFlag xmlns="" xmlns:ma14="http://schemas.microsoft.com/office/mac/drawingml/2011/main" val="1"/>
             </a:ext>
             <a:ext uri="{909E8E84-426E-40dd-AFC4-6F175D3DCCD1}">
-              <a14:hiddenFill xmlns="" xmlns:a14="http://schemas.microsoft.com/office/drawing/2010/main">
+              <a14:hiddenFill xmlns:a14="http://schemas.microsoft.com/office/drawing/2010/main" xmlns="">
                 <a:solidFill>
                   <a:srgbClr val="FFFFFF"/>
                 </a:solidFill>
@@ -3769,17 +3769,17 @@
           <a:noFill/>
           <a:extLst>
             <a:ext uri="{FAA26D3D-D897-4be2-8F04-BA451C77F1D7}">
-              <ma14:placeholderFlag xmlns:ma14="http://schemas.microsoft.com/office/mac/drawingml/2011/main" xmlns="" val="1"/>
+              <ma14:placeholderFlag xmlns="" xmlns:ma14="http://schemas.microsoft.com/office/mac/drawingml/2011/main" val="1"/>
             </a:ext>
             <a:ext uri="{909E8E84-426E-40dd-AFC4-6F175D3DCCD1}">
-              <a14:hiddenFill xmlns="" xmlns:a14="http://schemas.microsoft.com/office/drawing/2010/main">
+              <a14:hiddenFill xmlns:a14="http://schemas.microsoft.com/office/drawing/2010/main" xmlns="">
                 <a:solidFill>
                   <a:srgbClr val="FFFFFF"/>
                 </a:solidFill>
               </a14:hiddenFill>
             </a:ext>
             <a:ext uri="{91240B29-F687-4f45-9708-019B960494DF}">
-              <a14:hiddenLine xmlns="" xmlns:a14="http://schemas.microsoft.com/office/drawing/2010/main" w="9525">
+              <a14:hiddenLine xmlns:a14="http://schemas.microsoft.com/office/drawing/2010/main" xmlns="" w="9525">
                 <a:solidFill>
                   <a:srgbClr val="000000"/>
                 </a:solidFill>
@@ -3818,14 +3818,14 @@
           <a:noFill/>
           <a:extLst>
             <a:ext uri="{909E8E84-426E-40dd-AFC4-6F175D3DCCD1}">
-              <a14:hiddenFill xmlns="" xmlns:a14="http://schemas.microsoft.com/office/drawing/2010/main">
+              <a14:hiddenFill xmlns:a14="http://schemas.microsoft.com/office/drawing/2010/main" xmlns="">
                 <a:solidFill>
                   <a:srgbClr val="FFFFFF"/>
                 </a:solidFill>
               </a14:hiddenFill>
             </a:ext>
             <a:ext uri="{91240B29-F687-4f45-9708-019B960494DF}">
-              <a14:hiddenLine xmlns="" xmlns:a14="http://schemas.microsoft.com/office/drawing/2010/main" w="9525">
+              <a14:hiddenLine xmlns:a14="http://schemas.microsoft.com/office/drawing/2010/main" xmlns="" w="9525">
                 <a:solidFill>
                   <a:srgbClr val="000000"/>
                 </a:solidFill>
@@ -4016,10 +4016,10 @@
           </a:ln>
           <a:extLst>
             <a:ext uri="{FAA26D3D-D897-4be2-8F04-BA451C77F1D7}">
-              <ma14:placeholderFlag xmlns:ma14="http://schemas.microsoft.com/office/mac/drawingml/2011/main" xmlns="" val="1"/>
+              <ma14:placeholderFlag xmlns="" xmlns:ma14="http://schemas.microsoft.com/office/mac/drawingml/2011/main" val="1"/>
             </a:ext>
             <a:ext uri="{909E8E84-426E-40dd-AFC4-6F175D3DCCD1}">
-              <a14:hiddenFill xmlns="" xmlns:a14="http://schemas.microsoft.com/office/drawing/2010/main">
+              <a14:hiddenFill xmlns:a14="http://schemas.microsoft.com/office/drawing/2010/main" xmlns="">
                 <a:solidFill>
                   <a:srgbClr val="FFFFFF"/>
                 </a:solidFill>
@@ -4042,17 +4042,17 @@
           <a:noFill/>
           <a:extLst>
             <a:ext uri="{FAA26D3D-D897-4be2-8F04-BA451C77F1D7}">
-              <ma14:placeholderFlag xmlns:ma14="http://schemas.microsoft.com/office/mac/drawingml/2011/main" xmlns="" val="1"/>
+              <ma14:placeholderFlag xmlns="" xmlns:ma14="http://schemas.microsoft.com/office/mac/drawingml/2011/main" val="1"/>
             </a:ext>
             <a:ext uri="{909E8E84-426E-40dd-AFC4-6F175D3DCCD1}">
-              <a14:hiddenFill xmlns="" xmlns:a14="http://schemas.microsoft.com/office/drawing/2010/main">
+              <a14:hiddenFill xmlns:a14="http://schemas.microsoft.com/office/drawing/2010/main" xmlns="">
                 <a:solidFill>
                   <a:srgbClr val="FFFFFF"/>
                 </a:solidFill>
               </a14:hiddenFill>
             </a:ext>
             <a:ext uri="{91240B29-F687-4f45-9708-019B960494DF}">
-              <a14:hiddenLine xmlns="" xmlns:a14="http://schemas.microsoft.com/office/drawing/2010/main" w="9525">
+              <a14:hiddenLine xmlns:a14="http://schemas.microsoft.com/office/drawing/2010/main" xmlns="" w="9525">
                 <a:solidFill>
                   <a:srgbClr val="000000"/>
                 </a:solidFill>
@@ -4091,14 +4091,14 @@
           <a:noFill/>
           <a:extLst>
             <a:ext uri="{909E8E84-426E-40dd-AFC4-6F175D3DCCD1}">
-              <a14:hiddenFill xmlns="" xmlns:a14="http://schemas.microsoft.com/office/drawing/2010/main">
+              <a14:hiddenFill xmlns:a14="http://schemas.microsoft.com/office/drawing/2010/main" xmlns="">
                 <a:solidFill>
                   <a:srgbClr val="FFFFFF"/>
                 </a:solidFill>
               </a14:hiddenFill>
             </a:ext>
             <a:ext uri="{91240B29-F687-4f45-9708-019B960494DF}">
-              <a14:hiddenLine xmlns="" xmlns:a14="http://schemas.microsoft.com/office/drawing/2010/main" w="9525">
+              <a14:hiddenLine xmlns:a14="http://schemas.microsoft.com/office/drawing/2010/main" xmlns="" w="9525">
                 <a:solidFill>
                   <a:srgbClr val="000000"/>
                 </a:solidFill>
@@ -4289,10 +4289,10 @@
           </a:ln>
           <a:extLst>
             <a:ext uri="{FAA26D3D-D897-4be2-8F04-BA451C77F1D7}">
-              <ma14:placeholderFlag xmlns:ma14="http://schemas.microsoft.com/office/mac/drawingml/2011/main" xmlns="" val="1"/>
+              <ma14:placeholderFlag xmlns="" xmlns:ma14="http://schemas.microsoft.com/office/mac/drawingml/2011/main" val="1"/>
             </a:ext>
             <a:ext uri="{909E8E84-426E-40dd-AFC4-6F175D3DCCD1}">
-              <a14:hiddenFill xmlns="" xmlns:a14="http://schemas.microsoft.com/office/drawing/2010/main">
+              <a14:hiddenFill xmlns:a14="http://schemas.microsoft.com/office/drawing/2010/main" xmlns="">
                 <a:solidFill>
                   <a:srgbClr val="FFFFFF"/>
                 </a:solidFill>
@@ -4315,17 +4315,17 @@
           <a:noFill/>
           <a:extLst>
             <a:ext uri="{FAA26D3D-D897-4be2-8F04-BA451C77F1D7}">
-              <ma14:placeholderFlag xmlns:ma14="http://schemas.microsoft.com/office/mac/drawingml/2011/main" xmlns="" val="1"/>
+              <ma14:placeholderFlag xmlns="" xmlns:ma14="http://schemas.microsoft.com/office/mac/drawingml/2011/main" val="1"/>
             </a:ext>
             <a:ext uri="{909E8E84-426E-40dd-AFC4-6F175D3DCCD1}">
-              <a14:hiddenFill xmlns="" xmlns:a14="http://schemas.microsoft.com/office/drawing/2010/main">
+              <a14:hiddenFill xmlns:a14="http://schemas.microsoft.com/office/drawing/2010/main" xmlns="">
                 <a:solidFill>
                   <a:srgbClr val="FFFFFF"/>
                 </a:solidFill>
               </a14:hiddenFill>
             </a:ext>
             <a:ext uri="{91240B29-F687-4f45-9708-019B960494DF}">
-              <a14:hiddenLine xmlns="" xmlns:a14="http://schemas.microsoft.com/office/drawing/2010/main" w="9525">
+              <a14:hiddenLine xmlns:a14="http://schemas.microsoft.com/office/drawing/2010/main" xmlns="" w="9525">
                 <a:solidFill>
                   <a:srgbClr val="000000"/>
                 </a:solidFill>
@@ -4364,14 +4364,14 @@
           <a:noFill/>
           <a:extLst>
             <a:ext uri="{909E8E84-426E-40dd-AFC4-6F175D3DCCD1}">
-              <a14:hiddenFill xmlns="" xmlns:a14="http://schemas.microsoft.com/office/drawing/2010/main">
+              <a14:hiddenFill xmlns:a14="http://schemas.microsoft.com/office/drawing/2010/main" xmlns="">
                 <a:solidFill>
                   <a:srgbClr val="FFFFFF"/>
                 </a:solidFill>
               </a14:hiddenFill>
             </a:ext>
             <a:ext uri="{91240B29-F687-4f45-9708-019B960494DF}">
-              <a14:hiddenLine xmlns="" xmlns:a14="http://schemas.microsoft.com/office/drawing/2010/main" w="9525">
+              <a14:hiddenLine xmlns:a14="http://schemas.microsoft.com/office/drawing/2010/main" xmlns="" w="9525">
                 <a:solidFill>
                   <a:srgbClr val="000000"/>
                 </a:solidFill>
@@ -4699,10 +4699,10 @@
           </a:ln>
           <a:extLst>
             <a:ext uri="{FAA26D3D-D897-4be2-8F04-BA451C77F1D7}">
-              <ma14:placeholderFlag xmlns:ma14="http://schemas.microsoft.com/office/mac/drawingml/2011/main" xmlns="" val="1"/>
+              <ma14:placeholderFlag xmlns="" xmlns:ma14="http://schemas.microsoft.com/office/mac/drawingml/2011/main" val="1"/>
             </a:ext>
             <a:ext uri="{909E8E84-426E-40dd-AFC4-6F175D3DCCD1}">
-              <a14:hiddenFill xmlns="" xmlns:a14="http://schemas.microsoft.com/office/drawing/2010/main">
+              <a14:hiddenFill xmlns:a14="http://schemas.microsoft.com/office/drawing/2010/main" xmlns="">
                 <a:solidFill>
                   <a:srgbClr val="FFFFFF"/>
                 </a:solidFill>
@@ -4725,17 +4725,17 @@
           <a:noFill/>
           <a:extLst>
             <a:ext uri="{FAA26D3D-D897-4be2-8F04-BA451C77F1D7}">
-              <ma14:placeholderFlag xmlns:ma14="http://schemas.microsoft.com/office/mac/drawingml/2011/main" xmlns="" val="1"/>
+              <ma14:placeholderFlag xmlns="" xmlns:ma14="http://schemas.microsoft.com/office/mac/drawingml/2011/main" val="1"/>
             </a:ext>
             <a:ext uri="{909E8E84-426E-40dd-AFC4-6F175D3DCCD1}">
-              <a14:hiddenFill xmlns="" xmlns:a14="http://schemas.microsoft.com/office/drawing/2010/main">
+              <a14:hiddenFill xmlns:a14="http://schemas.microsoft.com/office/drawing/2010/main" xmlns="">
                 <a:solidFill>
                   <a:srgbClr val="FFFFFF"/>
                 </a:solidFill>
               </a14:hiddenFill>
             </a:ext>
             <a:ext uri="{91240B29-F687-4f45-9708-019B960494DF}">
-              <a14:hiddenLine xmlns="" xmlns:a14="http://schemas.microsoft.com/office/drawing/2010/main" w="9525">
+              <a14:hiddenLine xmlns:a14="http://schemas.microsoft.com/office/drawing/2010/main" xmlns="" w="9525">
                 <a:solidFill>
                   <a:srgbClr val="000000"/>
                 </a:solidFill>
@@ -4774,14 +4774,14 @@
           <a:noFill/>
           <a:extLst>
             <a:ext uri="{909E8E84-426E-40dd-AFC4-6F175D3DCCD1}">
-              <a14:hiddenFill xmlns="" xmlns:a14="http://schemas.microsoft.com/office/drawing/2010/main">
+              <a14:hiddenFill xmlns:a14="http://schemas.microsoft.com/office/drawing/2010/main" xmlns="">
                 <a:solidFill>
                   <a:srgbClr val="FFFFFF"/>
                 </a:solidFill>
               </a14:hiddenFill>
             </a:ext>
             <a:ext uri="{91240B29-F687-4f45-9708-019B960494DF}">
-              <a14:hiddenLine xmlns="" xmlns:a14="http://schemas.microsoft.com/office/drawing/2010/main" w="9525">
+              <a14:hiddenLine xmlns:a14="http://schemas.microsoft.com/office/drawing/2010/main" xmlns="" w="9525">
                 <a:solidFill>
                   <a:srgbClr val="000000"/>
                 </a:solidFill>
@@ -4972,10 +4972,10 @@
           </a:ln>
           <a:extLst>
             <a:ext uri="{FAA26D3D-D897-4be2-8F04-BA451C77F1D7}">
-              <ma14:placeholderFlag xmlns:ma14="http://schemas.microsoft.com/office/mac/drawingml/2011/main" xmlns="" val="1"/>
+              <ma14:placeholderFlag xmlns="" xmlns:ma14="http://schemas.microsoft.com/office/mac/drawingml/2011/main" val="1"/>
             </a:ext>
             <a:ext uri="{909E8E84-426E-40dd-AFC4-6F175D3DCCD1}">
-              <a14:hiddenFill xmlns="" xmlns:a14="http://schemas.microsoft.com/office/drawing/2010/main">
+              <a14:hiddenFill xmlns:a14="http://schemas.microsoft.com/office/drawing/2010/main" xmlns="">
                 <a:solidFill>
                   <a:srgbClr val="FFFFFF"/>
                 </a:solidFill>
@@ -4998,17 +4998,17 @@
           <a:noFill/>
           <a:extLst>
             <a:ext uri="{FAA26D3D-D897-4be2-8F04-BA451C77F1D7}">
-              <ma14:placeholderFlag xmlns:ma14="http://schemas.microsoft.com/office/mac/drawingml/2011/main" xmlns="" val="1"/>
+              <ma14:placeholderFlag xmlns="" xmlns:ma14="http://schemas.microsoft.com/office/mac/drawingml/2011/main" val="1"/>
             </a:ext>
             <a:ext uri="{909E8E84-426E-40dd-AFC4-6F175D3DCCD1}">
-              <a14:hiddenFill xmlns="" xmlns:a14="http://schemas.microsoft.com/office/drawing/2010/main">
+              <a14:hiddenFill xmlns:a14="http://schemas.microsoft.com/office/drawing/2010/main" xmlns="">
                 <a:solidFill>
                   <a:srgbClr val="FFFFFF"/>
                 </a:solidFill>
               </a14:hiddenFill>
             </a:ext>
             <a:ext uri="{91240B29-F687-4f45-9708-019B960494DF}">
-              <a14:hiddenLine xmlns="" xmlns:a14="http://schemas.microsoft.com/office/drawing/2010/main" w="9525">
+              <a14:hiddenLine xmlns:a14="http://schemas.microsoft.com/office/drawing/2010/main" xmlns="" w="9525">
                 <a:solidFill>
                   <a:srgbClr val="000000"/>
                 </a:solidFill>
@@ -5047,14 +5047,14 @@
           <a:noFill/>
           <a:extLst>
             <a:ext uri="{909E8E84-426E-40dd-AFC4-6F175D3DCCD1}">
-              <a14:hiddenFill xmlns="" xmlns:a14="http://schemas.microsoft.com/office/drawing/2010/main">
+              <a14:hiddenFill xmlns:a14="http://schemas.microsoft.com/office/drawing/2010/main" xmlns="">
                 <a:solidFill>
                   <a:srgbClr val="FFFFFF"/>
                 </a:solidFill>
               </a14:hiddenFill>
             </a:ext>
             <a:ext uri="{91240B29-F687-4f45-9708-019B960494DF}">
-              <a14:hiddenLine xmlns="" xmlns:a14="http://schemas.microsoft.com/office/drawing/2010/main" w="9525">
+              <a14:hiddenLine xmlns:a14="http://schemas.microsoft.com/office/drawing/2010/main" xmlns="" w="9525">
                 <a:solidFill>
                   <a:srgbClr val="000000"/>
                 </a:solidFill>
@@ -5245,10 +5245,10 @@
           </a:ln>
           <a:extLst>
             <a:ext uri="{FAA26D3D-D897-4be2-8F04-BA451C77F1D7}">
-              <ma14:placeholderFlag xmlns:ma14="http://schemas.microsoft.com/office/mac/drawingml/2011/main" xmlns="" val="1"/>
+              <ma14:placeholderFlag xmlns="" xmlns:ma14="http://schemas.microsoft.com/office/mac/drawingml/2011/main" val="1"/>
             </a:ext>
             <a:ext uri="{909E8E84-426E-40dd-AFC4-6F175D3DCCD1}">
-              <a14:hiddenFill xmlns="" xmlns:a14="http://schemas.microsoft.com/office/drawing/2010/main">
+              <a14:hiddenFill xmlns:a14="http://schemas.microsoft.com/office/drawing/2010/main" xmlns="">
                 <a:solidFill>
                   <a:srgbClr val="FFFFFF"/>
                 </a:solidFill>
@@ -5271,17 +5271,17 @@
           <a:noFill/>
           <a:extLst>
             <a:ext uri="{FAA26D3D-D897-4be2-8F04-BA451C77F1D7}">
-              <ma14:placeholderFlag xmlns:ma14="http://schemas.microsoft.com/office/mac/drawingml/2011/main" xmlns="" val="1"/>
+              <ma14:placeholderFlag xmlns="" xmlns:ma14="http://schemas.microsoft.com/office/mac/drawingml/2011/main" val="1"/>
             </a:ext>
             <a:ext uri="{909E8E84-426E-40dd-AFC4-6F175D3DCCD1}">
-              <a14:hiddenFill xmlns="" xmlns:a14="http://schemas.microsoft.com/office/drawing/2010/main">
+              <a14:hiddenFill xmlns:a14="http://schemas.microsoft.com/office/drawing/2010/main" xmlns="">
                 <a:solidFill>
                   <a:srgbClr val="FFFFFF"/>
                 </a:solidFill>
               </a14:hiddenFill>
             </a:ext>
             <a:ext uri="{91240B29-F687-4f45-9708-019B960494DF}">
-              <a14:hiddenLine xmlns="" xmlns:a14="http://schemas.microsoft.com/office/drawing/2010/main" w="9525">
+              <a14:hiddenLine xmlns:a14="http://schemas.microsoft.com/office/drawing/2010/main" xmlns="" w="9525">
                 <a:solidFill>
                   <a:srgbClr val="000000"/>
                 </a:solidFill>
@@ -5320,14 +5320,14 @@
           <a:noFill/>
           <a:extLst>
             <a:ext uri="{909E8E84-426E-40dd-AFC4-6F175D3DCCD1}">
-              <a14:hiddenFill xmlns="" xmlns:a14="http://schemas.microsoft.com/office/drawing/2010/main">
+              <a14:hiddenFill xmlns:a14="http://schemas.microsoft.com/office/drawing/2010/main" xmlns="">
                 <a:solidFill>
                   <a:srgbClr val="FFFFFF"/>
                 </a:solidFill>
               </a14:hiddenFill>
             </a:ext>
             <a:ext uri="{91240B29-F687-4f45-9708-019B960494DF}">
-              <a14:hiddenLine xmlns="" xmlns:a14="http://schemas.microsoft.com/office/drawing/2010/main" w="9525">
+              <a14:hiddenLine xmlns:a14="http://schemas.microsoft.com/office/drawing/2010/main" xmlns="" w="9525">
                 <a:solidFill>
                   <a:srgbClr val="000000"/>
                 </a:solidFill>
@@ -5518,10 +5518,10 @@
           </a:ln>
           <a:extLst>
             <a:ext uri="{FAA26D3D-D897-4be2-8F04-BA451C77F1D7}">
-              <ma14:placeholderFlag xmlns:ma14="http://schemas.microsoft.com/office/mac/drawingml/2011/main" xmlns="" val="1"/>
+              <ma14:placeholderFlag xmlns="" xmlns:ma14="http://schemas.microsoft.com/office/mac/drawingml/2011/main" val="1"/>
             </a:ext>
             <a:ext uri="{909E8E84-426E-40dd-AFC4-6F175D3DCCD1}">
-              <a14:hiddenFill xmlns="" xmlns:a14="http://schemas.microsoft.com/office/drawing/2010/main">
+              <a14:hiddenFill xmlns:a14="http://schemas.microsoft.com/office/drawing/2010/main" xmlns="">
                 <a:solidFill>
                   <a:srgbClr val="FFFFFF"/>
                 </a:solidFill>
@@ -5544,17 +5544,17 @@
           <a:noFill/>
           <a:extLst>
             <a:ext uri="{FAA26D3D-D897-4be2-8F04-BA451C77F1D7}">
-              <ma14:placeholderFlag xmlns:ma14="http://schemas.microsoft.com/office/mac/drawingml/2011/main" xmlns="" val="1"/>
+              <ma14:placeholderFlag xmlns="" xmlns:ma14="http://schemas.microsoft.com/office/mac/drawingml/2011/main" val="1"/>
             </a:ext>
             <a:ext uri="{909E8E84-426E-40dd-AFC4-6F175D3DCCD1}">
-              <a14:hiddenFill xmlns="" xmlns:a14="http://schemas.microsoft.com/office/drawing/2010/main">
+              <a14:hiddenFill xmlns:a14="http://schemas.microsoft.com/office/drawing/2010/main" xmlns="">
                 <a:solidFill>
                   <a:srgbClr val="FFFFFF"/>
                 </a:solidFill>
               </a14:hiddenFill>
             </a:ext>
             <a:ext uri="{91240B29-F687-4f45-9708-019B960494DF}">
-              <a14:hiddenLine xmlns="" xmlns:a14="http://schemas.microsoft.com/office/drawing/2010/main" w="9525">
+              <a14:hiddenLine xmlns:a14="http://schemas.microsoft.com/office/drawing/2010/main" xmlns="" w="9525">
                 <a:solidFill>
                   <a:srgbClr val="000000"/>
                 </a:solidFill>
@@ -5593,14 +5593,14 @@
           <a:noFill/>
           <a:extLst>
             <a:ext uri="{909E8E84-426E-40dd-AFC4-6F175D3DCCD1}">
-              <a14:hiddenFill xmlns="" xmlns:a14="http://schemas.microsoft.com/office/drawing/2010/main">
+              <a14:hiddenFill xmlns:a14="http://schemas.microsoft.com/office/drawing/2010/main" xmlns="">
                 <a:solidFill>
                   <a:srgbClr val="FFFFFF"/>
                 </a:solidFill>
               </a14:hiddenFill>
             </a:ext>
             <a:ext uri="{91240B29-F687-4f45-9708-019B960494DF}">
-              <a14:hiddenLine xmlns="" xmlns:a14="http://schemas.microsoft.com/office/drawing/2010/main" w="9525">
+              <a14:hiddenLine xmlns:a14="http://schemas.microsoft.com/office/drawing/2010/main" xmlns="" w="9525">
                 <a:solidFill>
                   <a:srgbClr val="000000"/>
                 </a:solidFill>
@@ -5791,10 +5791,10 @@
           </a:ln>
           <a:extLst>
             <a:ext uri="{FAA26D3D-D897-4be2-8F04-BA451C77F1D7}">
-              <ma14:placeholderFlag xmlns:ma14="http://schemas.microsoft.com/office/mac/drawingml/2011/main" xmlns="" val="1"/>
+              <ma14:placeholderFlag xmlns="" xmlns:ma14="http://schemas.microsoft.com/office/mac/drawingml/2011/main" val="1"/>
             </a:ext>
             <a:ext uri="{909E8E84-426E-40dd-AFC4-6F175D3DCCD1}">
-              <a14:hiddenFill xmlns="" xmlns:a14="http://schemas.microsoft.com/office/drawing/2010/main">
+              <a14:hiddenFill xmlns:a14="http://schemas.microsoft.com/office/drawing/2010/main" xmlns="">
                 <a:solidFill>
                   <a:srgbClr val="FFFFFF"/>
                 </a:solidFill>
@@ -5817,17 +5817,17 @@
           <a:noFill/>
           <a:extLst>
             <a:ext uri="{FAA26D3D-D897-4be2-8F04-BA451C77F1D7}">
-              <ma14:placeholderFlag xmlns:ma14="http://schemas.microsoft.com/office/mac/drawingml/2011/main" xmlns="" val="1"/>
+              <ma14:placeholderFlag xmlns="" xmlns:ma14="http://schemas.microsoft.com/office/mac/drawingml/2011/main" val="1"/>
             </a:ext>
             <a:ext uri="{909E8E84-426E-40dd-AFC4-6F175D3DCCD1}">
-              <a14:hiddenFill xmlns="" xmlns:a14="http://schemas.microsoft.com/office/drawing/2010/main">
+              <a14:hiddenFill xmlns:a14="http://schemas.microsoft.com/office/drawing/2010/main" xmlns="">
                 <a:solidFill>
                   <a:srgbClr val="FFFFFF"/>
                 </a:solidFill>
               </a14:hiddenFill>
             </a:ext>
             <a:ext uri="{91240B29-F687-4f45-9708-019B960494DF}">
-              <a14:hiddenLine xmlns="" xmlns:a14="http://schemas.microsoft.com/office/drawing/2010/main" w="9525">
+              <a14:hiddenLine xmlns:a14="http://schemas.microsoft.com/office/drawing/2010/main" xmlns="" w="9525">
                 <a:solidFill>
                   <a:srgbClr val="000000"/>
                 </a:solidFill>
@@ -5866,14 +5866,14 @@
           <a:noFill/>
           <a:extLst>
             <a:ext uri="{909E8E84-426E-40dd-AFC4-6F175D3DCCD1}">
-              <a14:hiddenFill xmlns="" xmlns:a14="http://schemas.microsoft.com/office/drawing/2010/main">
+              <a14:hiddenFill xmlns:a14="http://schemas.microsoft.com/office/drawing/2010/main" xmlns="">
                 <a:solidFill>
                   <a:srgbClr val="FFFFFF"/>
                 </a:solidFill>
               </a14:hiddenFill>
             </a:ext>
             <a:ext uri="{91240B29-F687-4f45-9708-019B960494DF}">
-              <a14:hiddenLine xmlns="" xmlns:a14="http://schemas.microsoft.com/office/drawing/2010/main" w="9525">
+              <a14:hiddenLine xmlns:a14="http://schemas.microsoft.com/office/drawing/2010/main" xmlns="" w="9525">
                 <a:solidFill>
                   <a:srgbClr val="000000"/>
                 </a:solidFill>
@@ -6064,10 +6064,10 @@
           </a:ln>
           <a:extLst>
             <a:ext uri="{FAA26D3D-D897-4be2-8F04-BA451C77F1D7}">
-              <ma14:placeholderFlag xmlns:ma14="http://schemas.microsoft.com/office/mac/drawingml/2011/main" xmlns="" val="1"/>
+              <ma14:placeholderFlag xmlns="" xmlns:ma14="http://schemas.microsoft.com/office/mac/drawingml/2011/main" val="1"/>
             </a:ext>
             <a:ext uri="{909E8E84-426E-40dd-AFC4-6F175D3DCCD1}">
-              <a14:hiddenFill xmlns="" xmlns:a14="http://schemas.microsoft.com/office/drawing/2010/main">
+              <a14:hiddenFill xmlns:a14="http://schemas.microsoft.com/office/drawing/2010/main" xmlns="">
                 <a:solidFill>
                   <a:srgbClr val="FFFFFF"/>
                 </a:solidFill>
@@ -6090,17 +6090,17 @@
           <a:noFill/>
           <a:extLst>
             <a:ext uri="{FAA26D3D-D897-4be2-8F04-BA451C77F1D7}">
-              <ma14:placeholderFlag xmlns:ma14="http://schemas.microsoft.com/office/mac/drawingml/2011/main" xmlns="" val="1"/>
+              <ma14:placeholderFlag xmlns="" xmlns:ma14="http://schemas.microsoft.com/office/mac/drawingml/2011/main" val="1"/>
             </a:ext>
             <a:ext uri="{909E8E84-426E-40dd-AFC4-6F175D3DCCD1}">
-              <a14:hiddenFill xmlns="" xmlns:a14="http://schemas.microsoft.com/office/drawing/2010/main">
+              <a14:hiddenFill xmlns:a14="http://schemas.microsoft.com/office/drawing/2010/main" xmlns="">
                 <a:solidFill>
                   <a:srgbClr val="FFFFFF"/>
                 </a:solidFill>
               </a14:hiddenFill>
             </a:ext>
             <a:ext uri="{91240B29-F687-4f45-9708-019B960494DF}">
-              <a14:hiddenLine xmlns="" xmlns:a14="http://schemas.microsoft.com/office/drawing/2010/main" w="9525">
+              <a14:hiddenLine xmlns:a14="http://schemas.microsoft.com/office/drawing/2010/main" xmlns="" w="9525">
                 <a:solidFill>
                   <a:srgbClr val="000000"/>
                 </a:solidFill>
@@ -6139,14 +6139,14 @@
           <a:noFill/>
           <a:extLst>
             <a:ext uri="{909E8E84-426E-40dd-AFC4-6F175D3DCCD1}">
-              <a14:hiddenFill xmlns="" xmlns:a14="http://schemas.microsoft.com/office/drawing/2010/main">
+              <a14:hiddenFill xmlns:a14="http://schemas.microsoft.com/office/drawing/2010/main" xmlns="">
                 <a:solidFill>
                   <a:srgbClr val="FFFFFF"/>
                 </a:solidFill>
               </a14:hiddenFill>
             </a:ext>
             <a:ext uri="{91240B29-F687-4f45-9708-019B960494DF}">
-              <a14:hiddenLine xmlns="" xmlns:a14="http://schemas.microsoft.com/office/drawing/2010/main" w="9525">
+              <a14:hiddenLine xmlns:a14="http://schemas.microsoft.com/office/drawing/2010/main" xmlns="" w="9525">
                 <a:solidFill>
                   <a:srgbClr val="000000"/>
                 </a:solidFill>
@@ -6337,10 +6337,10 @@
           </a:ln>
           <a:extLst>
             <a:ext uri="{FAA26D3D-D897-4be2-8F04-BA451C77F1D7}">
-              <ma14:placeholderFlag xmlns:ma14="http://schemas.microsoft.com/office/mac/drawingml/2011/main" xmlns="" val="1"/>
+              <ma14:placeholderFlag xmlns="" xmlns:ma14="http://schemas.microsoft.com/office/mac/drawingml/2011/main" val="1"/>
             </a:ext>
             <a:ext uri="{909E8E84-426E-40dd-AFC4-6F175D3DCCD1}">
-              <a14:hiddenFill xmlns="" xmlns:a14="http://schemas.microsoft.com/office/drawing/2010/main">
+              <a14:hiddenFill xmlns:a14="http://schemas.microsoft.com/office/drawing/2010/main" xmlns="">
                 <a:solidFill>
                   <a:srgbClr val="FFFFFF"/>
                 </a:solidFill>
@@ -6363,17 +6363,17 @@
           <a:noFill/>
           <a:extLst>
             <a:ext uri="{FAA26D3D-D897-4be2-8F04-BA451C77F1D7}">
-              <ma14:placeholderFlag xmlns:ma14="http://schemas.microsoft.com/office/mac/drawingml/2011/main" xmlns="" val="1"/>
+              <ma14:placeholderFlag xmlns="" xmlns:ma14="http://schemas.microsoft.com/office/mac/drawingml/2011/main" val="1"/>
             </a:ext>
             <a:ext uri="{909E8E84-426E-40dd-AFC4-6F175D3DCCD1}">
-              <a14:hiddenFill xmlns="" xmlns:a14="http://schemas.microsoft.com/office/drawing/2010/main">
+              <a14:hiddenFill xmlns:a14="http://schemas.microsoft.com/office/drawing/2010/main" xmlns="">
                 <a:solidFill>
                   <a:srgbClr val="FFFFFF"/>
                 </a:solidFill>
               </a14:hiddenFill>
             </a:ext>
             <a:ext uri="{91240B29-F687-4f45-9708-019B960494DF}">
-              <a14:hiddenLine xmlns="" xmlns:a14="http://schemas.microsoft.com/office/drawing/2010/main" w="9525">
+              <a14:hiddenLine xmlns:a14="http://schemas.microsoft.com/office/drawing/2010/main" xmlns="" w="9525">
                 <a:solidFill>
                   <a:srgbClr val="000000"/>
                 </a:solidFill>
@@ -6412,14 +6412,14 @@
           <a:noFill/>
           <a:extLst>
             <a:ext uri="{909E8E84-426E-40dd-AFC4-6F175D3DCCD1}">
-              <a14:hiddenFill xmlns="" xmlns:a14="http://schemas.microsoft.com/office/drawing/2010/main">
+              <a14:hiddenFill xmlns:a14="http://schemas.microsoft.com/office/drawing/2010/main" xmlns="">
                 <a:solidFill>
                   <a:srgbClr val="FFFFFF"/>
                 </a:solidFill>
               </a14:hiddenFill>
             </a:ext>
             <a:ext uri="{91240B29-F687-4f45-9708-019B960494DF}">
-              <a14:hiddenLine xmlns="" xmlns:a14="http://schemas.microsoft.com/office/drawing/2010/main" w="9525">
+              <a14:hiddenLine xmlns:a14="http://schemas.microsoft.com/office/drawing/2010/main" xmlns="" w="9525">
                 <a:solidFill>
                   <a:srgbClr val="000000"/>
                 </a:solidFill>
@@ -12621,10 +12621,10 @@
       </p:grpSpPr>
       <p:pic>
         <p:nvPicPr>
-          <p:cNvPr id="2" name="Picture 1" descr="Binary tree with nine nodes in four levels and the levels labeled 0 thru 3:&#10;&#10;- Level 0 contains the root node, which stores 8.&#10;- Level 1 (the 2nd level) has two child nodes connected to the 8 node: the 3 node on the left and 10 node on the right.&#10;- Level 2 (i.e. the 3rd level) has three nodes:&#10;  - The 3 node connects to the 1 node (left) and 6 node (right). The 1 node is a leaf.&#10;  - The 10 node only has a right child, the 14 node.&#10;- Level 3 (i.e. the fourth level) has three nodes:&#10;   - The 6 node has two children: the 4 node on the left and the 7 node on the right. Both are leaves.&#10;   - The 14 node only has a left child, the 13 node, which is a leaf.">
+          <p:cNvPr id="6" name="Picture 5">
             <a:extLst>
               <a:ext uri="{FF2B5EF4-FFF2-40B4-BE49-F238E27FC236}">
-                <a16:creationId xmlns:a16="http://schemas.microsoft.com/office/drawing/2014/main" id="{1C49EFBF-0CEE-090C-23A0-C561061DE199}"/>
+                <a16:creationId xmlns:a16="http://schemas.microsoft.com/office/drawing/2014/main" id="{C5659F60-41A7-8F99-371D-4C6AD060EAE1}"/>
               </a:ext>
             </a:extLst>
           </p:cNvPr>
@@ -12641,8 +12641,8 @@
         </p:blipFill>
         <p:spPr>
           <a:xfrm>
-            <a:off x="457200" y="860048"/>
-            <a:ext cx="6663847" cy="5219537"/>
+            <a:off x="152400" y="707142"/>
+            <a:ext cx="8610600" cy="5879810"/>
           </a:xfrm>
           <a:prstGeom prst="rect">
             <a:avLst/>
@@ -12800,14 +12800,19 @@
         <p:spPr bwMode="auto">
           <a:xfrm>
             <a:off x="5772150" y="5715000"/>
-            <a:ext cx="3352800" cy="523220"/>
+            <a:ext cx="3143250" cy="523220"/>
           </a:xfrm>
           <a:prstGeom prst="rect">
             <a:avLst/>
           </a:prstGeom>
           <a:noFill/>
-          <a:ln>
-            <a:noFill/>
+          <a:ln w="12700">
+            <a:solidFill>
+              <a:schemeClr val="tx1"/>
+            </a:solidFill>
+            <a:miter lim="800000"/>
+            <a:headEnd type="none" w="sm" len="sm"/>
+            <a:tailEnd type="none" w="sm" len="sm"/>
           </a:ln>
           <a:effectLst/>
           <a:extLst>
@@ -12817,16 +12822,6 @@
                   <a:schemeClr val="accent1"/>
                 </a:solidFill>
               </a14:hiddenFill>
-            </a:ext>
-            <a:ext uri="{91240B29-F687-4F45-9708-019B960494DF}">
-              <a14:hiddenLine xmlns:a14="http://schemas.microsoft.com/office/drawing/2010/main" w="12700">
-                <a:solidFill>
-                  <a:schemeClr val="tx1"/>
-                </a:solidFill>
-                <a:miter lim="800000"/>
-                <a:headEnd type="none" w="sm" len="sm"/>
-                <a:tailEnd type="none" w="sm" len="sm"/>
-              </a14:hiddenLine>
             </a:ext>
             <a:ext uri="{AF507438-7753-43E0-B8FC-AC1667EBCBE1}">
               <a14:hiddenEffects xmlns:a14="http://schemas.microsoft.com/office/drawing/2010/main">
@@ -12942,7 +12937,7 @@
             </a:lvl9pPr>
           </a:lstStyle>
           <a:p>
-            <a:pPr>
+            <a:pPr algn="ctr">
               <a:tabLst>
                 <a:tab pos="4114800" algn="l"/>
               </a:tabLst>
@@ -12961,7 +12956,7 @@
                   <a:schemeClr val="accent2"/>
                 </a:solidFill>
               </a:rPr>
-              <a:t>  =</a:t>
+              <a:t>  = 4</a:t>
             </a:r>
           </a:p>
         </p:txBody>
@@ -13010,189 +13005,6 @@
           </a:p>
         </p:txBody>
       </p:sp>
-      <p:sp>
-        <p:nvSpPr>
-          <p:cNvPr id="4" name="Text Box 2">
-            <a:extLst>
-              <a:ext uri="{FF2B5EF4-FFF2-40B4-BE49-F238E27FC236}">
-                <a16:creationId xmlns:a16="http://schemas.microsoft.com/office/drawing/2014/main" id="{57B2C892-193C-E6EF-A669-2394E312CBCA}"/>
-              </a:ext>
-            </a:extLst>
-          </p:cNvPr>
-          <p:cNvSpPr txBox="1">
-            <a:spLocks noChangeArrowheads="1"/>
-          </p:cNvSpPr>
-          <p:nvPr/>
-        </p:nvSpPr>
-        <p:spPr bwMode="auto">
-          <a:xfrm>
-            <a:off x="5772150" y="5715000"/>
-            <a:ext cx="3352800" cy="523220"/>
-          </a:xfrm>
-          <a:prstGeom prst="rect">
-            <a:avLst/>
-          </a:prstGeom>
-          <a:noFill/>
-          <a:ln>
-            <a:noFill/>
-          </a:ln>
-          <a:effectLst/>
-          <a:extLst>
-            <a:ext uri="{909E8E84-426E-40DD-AFC4-6F175D3DCCD1}">
-              <a14:hiddenFill xmlns:a14="http://schemas.microsoft.com/office/drawing/2010/main">
-                <a:solidFill>
-                  <a:schemeClr val="accent1"/>
-                </a:solidFill>
-              </a14:hiddenFill>
-            </a:ext>
-            <a:ext uri="{91240B29-F687-4F45-9708-019B960494DF}">
-              <a14:hiddenLine xmlns:a14="http://schemas.microsoft.com/office/drawing/2010/main" w="12700">
-                <a:solidFill>
-                  <a:schemeClr val="tx1"/>
-                </a:solidFill>
-                <a:miter lim="800000"/>
-                <a:headEnd type="none" w="sm" len="sm"/>
-                <a:tailEnd type="none" w="sm" len="sm"/>
-              </a14:hiddenLine>
-            </a:ext>
-            <a:ext uri="{AF507438-7753-43E0-B8FC-AC1667EBCBE1}">
-              <a14:hiddenEffects xmlns:a14="http://schemas.microsoft.com/office/drawing/2010/main">
-                <a:effectLst>
-                  <a:outerShdw dist="35921" dir="2700000" algn="ctr" rotWithShape="0">
-                    <a:schemeClr val="bg2"/>
-                  </a:outerShdw>
-                </a:effectLst>
-              </a14:hiddenEffects>
-            </a:ext>
-          </a:extLst>
-        </p:spPr>
-        <p:txBody>
-          <a:bodyPr wrap="square">
-            <a:spAutoFit/>
-          </a:bodyPr>
-          <a:lstStyle>
-            <a:lvl1pPr>
-              <a:defRPr sz="2400">
-                <a:solidFill>
-                  <a:schemeClr val="tx1"/>
-                </a:solidFill>
-                <a:latin typeface="Tahoma" pitchFamily="34" charset="0"/>
-              </a:defRPr>
-            </a:lvl1pPr>
-            <a:lvl2pPr marL="742950" indent="-285750">
-              <a:defRPr sz="2400">
-                <a:solidFill>
-                  <a:schemeClr val="tx1"/>
-                </a:solidFill>
-                <a:latin typeface="Tahoma" pitchFamily="34" charset="0"/>
-              </a:defRPr>
-            </a:lvl2pPr>
-            <a:lvl3pPr marL="1143000" indent="-228600">
-              <a:defRPr sz="2400">
-                <a:solidFill>
-                  <a:schemeClr val="tx1"/>
-                </a:solidFill>
-                <a:latin typeface="Tahoma" pitchFamily="34" charset="0"/>
-              </a:defRPr>
-            </a:lvl3pPr>
-            <a:lvl4pPr marL="1600200" indent="-228600">
-              <a:defRPr sz="2400">
-                <a:solidFill>
-                  <a:schemeClr val="tx1"/>
-                </a:solidFill>
-                <a:latin typeface="Tahoma" pitchFamily="34" charset="0"/>
-              </a:defRPr>
-            </a:lvl4pPr>
-            <a:lvl5pPr marL="2057400" indent="-228600">
-              <a:defRPr sz="2400">
-                <a:solidFill>
-                  <a:schemeClr val="tx1"/>
-                </a:solidFill>
-                <a:latin typeface="Tahoma" pitchFamily="34" charset="0"/>
-              </a:defRPr>
-            </a:lvl5pPr>
-            <a:lvl6pPr marL="2514600" indent="-228600" eaLnBrk="0" fontAlgn="base" hangingPunct="0">
-              <a:spcBef>
-                <a:spcPct val="0"/>
-              </a:spcBef>
-              <a:spcAft>
-                <a:spcPct val="0"/>
-              </a:spcAft>
-              <a:defRPr sz="2400">
-                <a:solidFill>
-                  <a:schemeClr val="tx1"/>
-                </a:solidFill>
-                <a:latin typeface="Tahoma" pitchFamily="34" charset="0"/>
-              </a:defRPr>
-            </a:lvl6pPr>
-            <a:lvl7pPr marL="2971800" indent="-228600" eaLnBrk="0" fontAlgn="base" hangingPunct="0">
-              <a:spcBef>
-                <a:spcPct val="0"/>
-              </a:spcBef>
-              <a:spcAft>
-                <a:spcPct val="0"/>
-              </a:spcAft>
-              <a:defRPr sz="2400">
-                <a:solidFill>
-                  <a:schemeClr val="tx1"/>
-                </a:solidFill>
-                <a:latin typeface="Tahoma" pitchFamily="34" charset="0"/>
-              </a:defRPr>
-            </a:lvl7pPr>
-            <a:lvl8pPr marL="3429000" indent="-228600" eaLnBrk="0" fontAlgn="base" hangingPunct="0">
-              <a:spcBef>
-                <a:spcPct val="0"/>
-              </a:spcBef>
-              <a:spcAft>
-                <a:spcPct val="0"/>
-              </a:spcAft>
-              <a:defRPr sz="2400">
-                <a:solidFill>
-                  <a:schemeClr val="tx1"/>
-                </a:solidFill>
-                <a:latin typeface="Tahoma" pitchFamily="34" charset="0"/>
-              </a:defRPr>
-            </a:lvl8pPr>
-            <a:lvl9pPr marL="3886200" indent="-228600" eaLnBrk="0" fontAlgn="base" hangingPunct="0">
-              <a:spcBef>
-                <a:spcPct val="0"/>
-              </a:spcBef>
-              <a:spcAft>
-                <a:spcPct val="0"/>
-              </a:spcAft>
-              <a:defRPr sz="2400">
-                <a:solidFill>
-                  <a:schemeClr val="tx1"/>
-                </a:solidFill>
-                <a:latin typeface="Tahoma" pitchFamily="34" charset="0"/>
-              </a:defRPr>
-            </a:lvl9pPr>
-          </a:lstStyle>
-          <a:p>
-            <a:pPr>
-              <a:tabLst>
-                <a:tab pos="4114800" algn="l"/>
-              </a:tabLst>
-            </a:pPr>
-            <a:r>
-              <a:rPr lang="en-US" sz="2800" b="1" dirty="0" err="1">
-                <a:solidFill>
-                  <a:schemeClr val="accent2"/>
-                </a:solidFill>
-              </a:rPr>
-              <a:t>NumLevels</a:t>
-            </a:r>
-            <a:r>
-              <a:rPr lang="en-US" sz="2800" b="1" dirty="0">
-                <a:solidFill>
-                  <a:schemeClr val="accent2"/>
-                </a:solidFill>
-              </a:rPr>
-              <a:t>  =  4</a:t>
-            </a:r>
-          </a:p>
-        </p:txBody>
-      </p:sp>
     </p:spTree>
     <p:extLst>
       <p:ext uri="{BB962C8B-B14F-4D97-AF65-F5344CB8AC3E}">
@@ -13203,84 +13015,6 @@
   <p:clrMapOvr>
     <a:masterClrMapping/>
   </p:clrMapOvr>
-  <p:timing>
-    <p:tnLst>
-      <p:par>
-        <p:cTn id="1" dur="indefinite" restart="never" nodeType="tmRoot">
-          <p:childTnLst>
-            <p:seq concurrent="1" nextAc="seek">
-              <p:cTn id="2" dur="indefinite" nodeType="mainSeq">
-                <p:childTnLst>
-                  <p:par>
-                    <p:cTn id="3" fill="hold">
-                      <p:stCondLst>
-                        <p:cond delay="indefinite"/>
-                      </p:stCondLst>
-                      <p:childTnLst>
-                        <p:par>
-                          <p:cTn id="4" fill="hold">
-                            <p:stCondLst>
-                              <p:cond delay="0"/>
-                            </p:stCondLst>
-                            <p:childTnLst>
-                              <p:par>
-                                <p:cTn id="5" presetID="1" presetClass="entr" presetSubtype="0" fill="hold" grpId="0" nodeType="clickEffect">
-                                  <p:stCondLst>
-                                    <p:cond delay="0"/>
-                                  </p:stCondLst>
-                                  <p:childTnLst>
-                                    <p:set>
-                                      <p:cBhvr>
-                                        <p:cTn id="6" dur="1" fill="hold">
-                                          <p:stCondLst>
-                                            <p:cond delay="0"/>
-                                          </p:stCondLst>
-                                        </p:cTn>
-                                        <p:tgtEl>
-                                          <p:spTgt spid="4"/>
-                                        </p:tgtEl>
-                                        <p:attrNameLst>
-                                          <p:attrName>style.visibility</p:attrName>
-                                        </p:attrNameLst>
-                                      </p:cBhvr>
-                                      <p:to>
-                                        <p:strVal val="visible"/>
-                                      </p:to>
-                                    </p:set>
-                                  </p:childTnLst>
-                                </p:cTn>
-                              </p:par>
-                            </p:childTnLst>
-                          </p:cTn>
-                        </p:par>
-                      </p:childTnLst>
-                    </p:cTn>
-                  </p:par>
-                </p:childTnLst>
-              </p:cTn>
-              <p:prevCondLst>
-                <p:cond evt="onPrev" delay="0">
-                  <p:tgtEl>
-                    <p:sldTgt/>
-                  </p:tgtEl>
-                </p:cond>
-              </p:prevCondLst>
-              <p:nextCondLst>
-                <p:cond evt="onNext" delay="0">
-                  <p:tgtEl>
-                    <p:sldTgt/>
-                  </p:tgtEl>
-                </p:cond>
-              </p:nextCondLst>
-            </p:seq>
-          </p:childTnLst>
-        </p:cTn>
-      </p:par>
-    </p:tnLst>
-    <p:bldLst>
-      <p:bldP spid="4" grpId="0"/>
-    </p:bldLst>
-  </p:timing>
 </p:sld>
 </file>
 
@@ -25511,14 +25245,14 @@
           <a:noFill/>
           <a:extLst>
             <a:ext uri="{909E8E84-426E-40dd-AFC4-6F175D3DCCD1}">
-              <a14:hiddenFill xmlns:a14="http://schemas.microsoft.com/office/drawing/2010/main" xmlns="">
+              <a14:hiddenFill xmlns="" xmlns:a14="http://schemas.microsoft.com/office/drawing/2010/main">
                 <a:solidFill>
                   <a:srgbClr val="FFFFFF"/>
                 </a:solidFill>
               </a14:hiddenFill>
             </a:ext>
             <a:ext uri="{91240B29-F687-4f45-9708-019B960494DF}">
-              <a14:hiddenLine xmlns:a14="http://schemas.microsoft.com/office/drawing/2010/main" xmlns="" w="9525">
+              <a14:hiddenLine xmlns="" xmlns:a14="http://schemas.microsoft.com/office/drawing/2010/main" w="9525">
                 <a:solidFill>
                   <a:srgbClr val="000000"/>
                 </a:solidFill>
@@ -25941,14 +25675,14 @@
               </a:ln>
               <a:extLst>
                 <a:ext uri="{909E8E84-426E-40dd-AFC4-6F175D3DCCD1}">
-                  <a14:hiddenFill xmlns:a14="http://schemas.microsoft.com/office/drawing/2010/main" xmlns="">
+                  <a14:hiddenFill xmlns="" xmlns:a14="http://schemas.microsoft.com/office/drawing/2010/main">
                     <a:solidFill>
                       <a:srgbClr val="FFFFFF"/>
                     </a:solidFill>
                   </a14:hiddenFill>
                 </a:ext>
                 <a:ext uri="{91240B29-F687-4f45-9708-019B960494DF}">
-                  <a14:hiddenLine xmlns:a14="http://schemas.microsoft.com/office/drawing/2010/main" xmlns="" w="9525">
+                  <a14:hiddenLine xmlns="" xmlns:a14="http://schemas.microsoft.com/office/drawing/2010/main" w="9525">
                     <a:solidFill>
                       <a:srgbClr val="000000"/>
                     </a:solidFill>
@@ -26176,14 +25910,14 @@
               </a:ln>
               <a:extLst>
                 <a:ext uri="{909E8E84-426E-40dd-AFC4-6F175D3DCCD1}">
-                  <a14:hiddenFill xmlns:a14="http://schemas.microsoft.com/office/drawing/2010/main" xmlns="">
+                  <a14:hiddenFill xmlns="" xmlns:a14="http://schemas.microsoft.com/office/drawing/2010/main">
                     <a:solidFill>
                       <a:srgbClr val="FFFFFF"/>
                     </a:solidFill>
                   </a14:hiddenFill>
                 </a:ext>
                 <a:ext uri="{91240B29-F687-4f45-9708-019B960494DF}">
-                  <a14:hiddenLine xmlns:a14="http://schemas.microsoft.com/office/drawing/2010/main" xmlns="" w="9525">
+                  <a14:hiddenLine xmlns="" xmlns:a14="http://schemas.microsoft.com/office/drawing/2010/main" w="9525">
                     <a:solidFill>
                       <a:srgbClr val="000000"/>
                     </a:solidFill>
@@ -26370,7 +26104,7 @@
               </a:ln>
               <a:extLst>
                 <a:ext uri="{909E8E84-426E-40dd-AFC4-6F175D3DCCD1}">
-                  <a14:hiddenFill xmlns:a14="http://schemas.microsoft.com/office/drawing/2010/main" xmlns="">
+                  <a14:hiddenFill xmlns="" xmlns:a14="http://schemas.microsoft.com/office/drawing/2010/main">
                     <a:solidFill>
                       <a:srgbClr val="FFFFFF"/>
                     </a:solidFill>
@@ -26529,7 +26263,7 @@
               </a:ln>
               <a:extLst>
                 <a:ext uri="{909E8E84-426E-40dd-AFC4-6F175D3DCCD1}">
-                  <a14:hiddenFill xmlns:a14="http://schemas.microsoft.com/office/drawing/2010/main" xmlns="">
+                  <a14:hiddenFill xmlns="" xmlns:a14="http://schemas.microsoft.com/office/drawing/2010/main">
                     <a:solidFill>
                       <a:srgbClr val="FFFFFF"/>
                     </a:solidFill>
@@ -26688,7 +26422,7 @@
               </a:ln>
               <a:extLst>
                 <a:ext uri="{909E8E84-426E-40dd-AFC4-6F175D3DCCD1}">
-                  <a14:hiddenFill xmlns:a14="http://schemas.microsoft.com/office/drawing/2010/main" xmlns="">
+                  <a14:hiddenFill xmlns="" xmlns:a14="http://schemas.microsoft.com/office/drawing/2010/main">
                     <a:solidFill>
                       <a:srgbClr val="FFFFFF"/>
                     </a:solidFill>
@@ -26842,14 +26576,14 @@
               </a:ln>
               <a:extLst>
                 <a:ext uri="{909E8E84-426E-40dd-AFC4-6F175D3DCCD1}">
-                  <a14:hiddenFill xmlns:a14="http://schemas.microsoft.com/office/drawing/2010/main" xmlns="">
+                  <a14:hiddenFill xmlns="" xmlns:a14="http://schemas.microsoft.com/office/drawing/2010/main">
                     <a:solidFill>
                       <a:srgbClr val="FFFFFF"/>
                     </a:solidFill>
                   </a14:hiddenFill>
                 </a:ext>
                 <a:ext uri="{91240B29-F687-4f45-9708-019B960494DF}">
-                  <a14:hiddenLine xmlns:a14="http://schemas.microsoft.com/office/drawing/2010/main" xmlns="" w="12700">
+                  <a14:hiddenLine xmlns="" xmlns:a14="http://schemas.microsoft.com/office/drawing/2010/main" w="12700">
                     <a:solidFill>
                       <a:srgbClr val="000000"/>
                     </a:solidFill>
@@ -27017,14 +26751,14 @@
               </a:ln>
               <a:extLst>
                 <a:ext uri="{909E8E84-426E-40dd-AFC4-6F175D3DCCD1}">
-                  <a14:hiddenFill xmlns:a14="http://schemas.microsoft.com/office/drawing/2010/main" xmlns="">
+                  <a14:hiddenFill xmlns="" xmlns:a14="http://schemas.microsoft.com/office/drawing/2010/main">
                     <a:solidFill>
                       <a:srgbClr val="FFFFFF"/>
                     </a:solidFill>
                   </a14:hiddenFill>
                 </a:ext>
                 <a:ext uri="{91240B29-F687-4f45-9708-019B960494DF}">
-                  <a14:hiddenLine xmlns:a14="http://schemas.microsoft.com/office/drawing/2010/main" xmlns="" w="12700">
+                  <a14:hiddenLine xmlns="" xmlns:a14="http://schemas.microsoft.com/office/drawing/2010/main" w="12700">
                     <a:solidFill>
                       <a:srgbClr val="000000"/>
                     </a:solidFill>
@@ -27192,14 +26926,14 @@
               </a:ln>
               <a:extLst>
                 <a:ext uri="{909E8E84-426E-40dd-AFC4-6F175D3DCCD1}">
-                  <a14:hiddenFill xmlns:a14="http://schemas.microsoft.com/office/drawing/2010/main" xmlns="">
+                  <a14:hiddenFill xmlns="" xmlns:a14="http://schemas.microsoft.com/office/drawing/2010/main">
                     <a:solidFill>
                       <a:srgbClr val="FFFFFF"/>
                     </a:solidFill>
                   </a14:hiddenFill>
                 </a:ext>
                 <a:ext uri="{91240B29-F687-4f45-9708-019B960494DF}">
-                  <a14:hiddenLine xmlns:a14="http://schemas.microsoft.com/office/drawing/2010/main" xmlns="" w="12700">
+                  <a14:hiddenLine xmlns="" xmlns:a14="http://schemas.microsoft.com/office/drawing/2010/main" w="12700">
                     <a:solidFill>
                       <a:srgbClr val="000000"/>
                     </a:solidFill>
@@ -27372,7 +27106,7 @@
               </a:ln>
               <a:extLst>
                 <a:ext uri="{909E8E84-426E-40dd-AFC4-6F175D3DCCD1}">
-                  <a14:hiddenFill xmlns:a14="http://schemas.microsoft.com/office/drawing/2010/main" xmlns="">
+                  <a14:hiddenFill xmlns="" xmlns:a14="http://schemas.microsoft.com/office/drawing/2010/main">
                     <a:noFill/>
                   </a14:hiddenFill>
                 </a:ext>
@@ -27413,7 +27147,7 @@
               </a:ln>
               <a:extLst>
                 <a:ext uri="{909E8E84-426E-40dd-AFC4-6F175D3DCCD1}">
-                  <a14:hiddenFill xmlns:a14="http://schemas.microsoft.com/office/drawing/2010/main" xmlns="">
+                  <a14:hiddenFill xmlns="" xmlns:a14="http://schemas.microsoft.com/office/drawing/2010/main">
                     <a:noFill/>
                   </a14:hiddenFill>
                 </a:ext>
@@ -27454,7 +27188,7 @@
               </a:ln>
               <a:extLst>
                 <a:ext uri="{909E8E84-426E-40dd-AFC4-6F175D3DCCD1}">
-                  <a14:hiddenFill xmlns:a14="http://schemas.microsoft.com/office/drawing/2010/main" xmlns="">
+                  <a14:hiddenFill xmlns="" xmlns:a14="http://schemas.microsoft.com/office/drawing/2010/main">
                     <a:solidFill>
                       <a:srgbClr val="FFFFFF"/>
                     </a:solidFill>
@@ -27613,7 +27347,7 @@
               </a:ln>
               <a:extLst>
                 <a:ext uri="{909E8E84-426E-40dd-AFC4-6F175D3DCCD1}">
-                  <a14:hiddenFill xmlns:a14="http://schemas.microsoft.com/office/drawing/2010/main" xmlns="">
+                  <a14:hiddenFill xmlns="" xmlns:a14="http://schemas.microsoft.com/office/drawing/2010/main">
                     <a:solidFill>
                       <a:srgbClr val="FFFFFF"/>
                     </a:solidFill>
@@ -27772,7 +27506,7 @@
               </a:ln>
               <a:extLst>
                 <a:ext uri="{909E8E84-426E-40dd-AFC4-6F175D3DCCD1}">
-                  <a14:hiddenFill xmlns:a14="http://schemas.microsoft.com/office/drawing/2010/main" xmlns="">
+                  <a14:hiddenFill xmlns="" xmlns:a14="http://schemas.microsoft.com/office/drawing/2010/main">
                     <a:solidFill>
                       <a:srgbClr val="FFFFFF"/>
                     </a:solidFill>
@@ -27926,14 +27660,14 @@
               </a:ln>
               <a:extLst>
                 <a:ext uri="{909E8E84-426E-40dd-AFC4-6F175D3DCCD1}">
-                  <a14:hiddenFill xmlns:a14="http://schemas.microsoft.com/office/drawing/2010/main" xmlns="">
+                  <a14:hiddenFill xmlns="" xmlns:a14="http://schemas.microsoft.com/office/drawing/2010/main">
                     <a:solidFill>
                       <a:srgbClr val="FFFFFF"/>
                     </a:solidFill>
                   </a14:hiddenFill>
                 </a:ext>
                 <a:ext uri="{91240B29-F687-4f45-9708-019B960494DF}">
-                  <a14:hiddenLine xmlns:a14="http://schemas.microsoft.com/office/drawing/2010/main" xmlns="" w="12700">
+                  <a14:hiddenLine xmlns="" xmlns:a14="http://schemas.microsoft.com/office/drawing/2010/main" w="12700">
                     <a:solidFill>
                       <a:srgbClr val="000000"/>
                     </a:solidFill>
@@ -28101,14 +27835,14 @@
               </a:ln>
               <a:extLst>
                 <a:ext uri="{909E8E84-426E-40dd-AFC4-6F175D3DCCD1}">
-                  <a14:hiddenFill xmlns:a14="http://schemas.microsoft.com/office/drawing/2010/main" xmlns="">
+                  <a14:hiddenFill xmlns="" xmlns:a14="http://schemas.microsoft.com/office/drawing/2010/main">
                     <a:solidFill>
                       <a:srgbClr val="FFFFFF"/>
                     </a:solidFill>
                   </a14:hiddenFill>
                 </a:ext>
                 <a:ext uri="{91240B29-F687-4f45-9708-019B960494DF}">
-                  <a14:hiddenLine xmlns:a14="http://schemas.microsoft.com/office/drawing/2010/main" xmlns="" w="12700">
+                  <a14:hiddenLine xmlns="" xmlns:a14="http://schemas.microsoft.com/office/drawing/2010/main" w="12700">
                     <a:solidFill>
                       <a:srgbClr val="000000"/>
                     </a:solidFill>
@@ -28281,7 +28015,7 @@
               </a:ln>
               <a:extLst>
                 <a:ext uri="{909E8E84-426E-40dd-AFC4-6F175D3DCCD1}">
-                  <a14:hiddenFill xmlns:a14="http://schemas.microsoft.com/office/drawing/2010/main" xmlns="">
+                  <a14:hiddenFill xmlns="" xmlns:a14="http://schemas.microsoft.com/office/drawing/2010/main">
                     <a:noFill/>
                   </a14:hiddenFill>
                 </a:ext>
@@ -28322,7 +28056,7 @@
               </a:ln>
               <a:extLst>
                 <a:ext uri="{909E8E84-426E-40dd-AFC4-6F175D3DCCD1}">
-                  <a14:hiddenFill xmlns:a14="http://schemas.microsoft.com/office/drawing/2010/main" xmlns="">
+                  <a14:hiddenFill xmlns="" xmlns:a14="http://schemas.microsoft.com/office/drawing/2010/main">
                     <a:noFill/>
                   </a14:hiddenFill>
                 </a:ext>
@@ -28363,7 +28097,7 @@
               </a:ln>
               <a:extLst>
                 <a:ext uri="{909E8E84-426E-40dd-AFC4-6F175D3DCCD1}">
-                  <a14:hiddenFill xmlns:a14="http://schemas.microsoft.com/office/drawing/2010/main" xmlns="">
+                  <a14:hiddenFill xmlns="" xmlns:a14="http://schemas.microsoft.com/office/drawing/2010/main">
                     <a:solidFill>
                       <a:srgbClr val="FFFFFF"/>
                     </a:solidFill>
@@ -28522,7 +28256,7 @@
               </a:ln>
               <a:extLst>
                 <a:ext uri="{909E8E84-426E-40dd-AFC4-6F175D3DCCD1}">
-                  <a14:hiddenFill xmlns:a14="http://schemas.microsoft.com/office/drawing/2010/main" xmlns="">
+                  <a14:hiddenFill xmlns="" xmlns:a14="http://schemas.microsoft.com/office/drawing/2010/main">
                     <a:noFill/>
                   </a14:hiddenFill>
                 </a:ext>
@@ -28563,7 +28297,7 @@
               </a:ln>
               <a:extLst>
                 <a:ext uri="{909E8E84-426E-40dd-AFC4-6F175D3DCCD1}">
-                  <a14:hiddenFill xmlns:a14="http://schemas.microsoft.com/office/drawing/2010/main" xmlns="">
+                  <a14:hiddenFill xmlns="" xmlns:a14="http://schemas.microsoft.com/office/drawing/2010/main">
                     <a:noFill/>
                   </a14:hiddenFill>
                 </a:ext>
@@ -28599,14 +28333,14 @@
               </a:ln>
               <a:extLst>
                 <a:ext uri="{909E8E84-426E-40dd-AFC4-6F175D3DCCD1}">
-                  <a14:hiddenFill xmlns:a14="http://schemas.microsoft.com/office/drawing/2010/main" xmlns="">
+                  <a14:hiddenFill xmlns="" xmlns:a14="http://schemas.microsoft.com/office/drawing/2010/main">
                     <a:solidFill>
                       <a:srgbClr val="FFFFFF"/>
                     </a:solidFill>
                   </a14:hiddenFill>
                 </a:ext>
                 <a:ext uri="{91240B29-F687-4f45-9708-019B960494DF}">
-                  <a14:hiddenLine xmlns:a14="http://schemas.microsoft.com/office/drawing/2010/main" xmlns="" w="12700">
+                  <a14:hiddenLine xmlns="" xmlns:a14="http://schemas.microsoft.com/office/drawing/2010/main" w="12700">
                     <a:solidFill>
                       <a:srgbClr val="000000"/>
                     </a:solidFill>
@@ -28774,14 +28508,14 @@
               </a:ln>
               <a:extLst>
                 <a:ext uri="{909E8E84-426E-40dd-AFC4-6F175D3DCCD1}">
-                  <a14:hiddenFill xmlns:a14="http://schemas.microsoft.com/office/drawing/2010/main" xmlns="">
+                  <a14:hiddenFill xmlns="" xmlns:a14="http://schemas.microsoft.com/office/drawing/2010/main">
                     <a:solidFill>
                       <a:srgbClr val="FFFFFF"/>
                     </a:solidFill>
                   </a14:hiddenFill>
                 </a:ext>
                 <a:ext uri="{91240B29-F687-4f45-9708-019B960494DF}">
-                  <a14:hiddenLine xmlns:a14="http://schemas.microsoft.com/office/drawing/2010/main" xmlns="" w="12700">
+                  <a14:hiddenLine xmlns="" xmlns:a14="http://schemas.microsoft.com/office/drawing/2010/main" w="12700">
                     <a:solidFill>
                       <a:srgbClr val="000000"/>
                     </a:solidFill>
@@ -32511,14 +32245,14 @@
           <a:noFill/>
           <a:extLst>
             <a:ext uri="{909E8E84-426E-40dd-AFC4-6F175D3DCCD1}">
-              <a14:hiddenFill xmlns="" xmlns:a14="http://schemas.microsoft.com/office/drawing/2010/main">
+              <a14:hiddenFill xmlns:a14="http://schemas.microsoft.com/office/drawing/2010/main" xmlns="">
                 <a:solidFill>
                   <a:srgbClr val="FFFFFF"/>
                 </a:solidFill>
               </a14:hiddenFill>
             </a:ext>
             <a:ext uri="{91240B29-F687-4f45-9708-019B960494DF}">
-              <a14:hiddenLine xmlns="" xmlns:a14="http://schemas.microsoft.com/office/drawing/2010/main" w="9525">
+              <a14:hiddenLine xmlns:a14="http://schemas.microsoft.com/office/drawing/2010/main" xmlns="" w="9525">
                 <a:solidFill>
                   <a:srgbClr val="000000"/>
                 </a:solidFill>
@@ -32816,14 +32550,14 @@
           <a:noFill/>
           <a:extLst>
             <a:ext uri="{909E8E84-426E-40dd-AFC4-6F175D3DCCD1}">
-              <a14:hiddenFill xmlns="" xmlns:a14="http://schemas.microsoft.com/office/drawing/2010/main">
+              <a14:hiddenFill xmlns:a14="http://schemas.microsoft.com/office/drawing/2010/main" xmlns="">
                 <a:solidFill>
                   <a:srgbClr val="FFFFFF"/>
                 </a:solidFill>
               </a14:hiddenFill>
             </a:ext>
             <a:ext uri="{91240B29-F687-4f45-9708-019B960494DF}">
-              <a14:hiddenLine xmlns="" xmlns:a14="http://schemas.microsoft.com/office/drawing/2010/main" w="9525">
+              <a14:hiddenLine xmlns:a14="http://schemas.microsoft.com/office/drawing/2010/main" xmlns="" w="9525">
                 <a:solidFill>
                   <a:srgbClr val="000000"/>
                 </a:solidFill>
@@ -33127,14 +32861,14 @@
           <a:noFill/>
           <a:extLst>
             <a:ext uri="{909E8E84-426E-40dd-AFC4-6F175D3DCCD1}">
-              <a14:hiddenFill xmlns="" xmlns:a14="http://schemas.microsoft.com/office/drawing/2010/main">
+              <a14:hiddenFill xmlns:a14="http://schemas.microsoft.com/office/drawing/2010/main" xmlns="">
                 <a:solidFill>
                   <a:srgbClr val="FFFFFF"/>
                 </a:solidFill>
               </a14:hiddenFill>
             </a:ext>
             <a:ext uri="{91240B29-F687-4f45-9708-019B960494DF}">
-              <a14:hiddenLine xmlns="" xmlns:a14="http://schemas.microsoft.com/office/drawing/2010/main" w="9525">
+              <a14:hiddenLine xmlns:a14="http://schemas.microsoft.com/office/drawing/2010/main" xmlns="" w="9525">
                 <a:solidFill>
                   <a:srgbClr val="000000"/>
                 </a:solidFill>
@@ -33530,14 +33264,14 @@
           <a:noFill/>
           <a:extLst>
             <a:ext uri="{909E8E84-426E-40dd-AFC4-6F175D3DCCD1}">
-              <a14:hiddenFill xmlns="" xmlns:a14="http://schemas.microsoft.com/office/drawing/2010/main">
+              <a14:hiddenFill xmlns:a14="http://schemas.microsoft.com/office/drawing/2010/main" xmlns="">
                 <a:solidFill>
                   <a:srgbClr val="FFFFFF"/>
                 </a:solidFill>
               </a14:hiddenFill>
             </a:ext>
             <a:ext uri="{91240B29-F687-4f45-9708-019B960494DF}">
-              <a14:hiddenLine xmlns="" xmlns:a14="http://schemas.microsoft.com/office/drawing/2010/main" w="9525">
+              <a14:hiddenLine xmlns:a14="http://schemas.microsoft.com/office/drawing/2010/main" xmlns="" w="9525">
                 <a:solidFill>
                   <a:srgbClr val="000000"/>
                 </a:solidFill>
@@ -33966,14 +33700,14 @@
           <a:noFill/>
           <a:extLst>
             <a:ext uri="{909E8E84-426E-40dd-AFC4-6F175D3DCCD1}">
-              <a14:hiddenFill xmlns="" xmlns:a14="http://schemas.microsoft.com/office/drawing/2010/main">
+              <a14:hiddenFill xmlns:a14="http://schemas.microsoft.com/office/drawing/2010/main" xmlns="">
                 <a:solidFill>
                   <a:srgbClr val="FFFFFF"/>
                 </a:solidFill>
               </a14:hiddenFill>
             </a:ext>
             <a:ext uri="{91240B29-F687-4f45-9708-019B960494DF}">
-              <a14:hiddenLine xmlns="" xmlns:a14="http://schemas.microsoft.com/office/drawing/2010/main" w="9525">
+              <a14:hiddenLine xmlns:a14="http://schemas.microsoft.com/office/drawing/2010/main" xmlns="" w="9525">
                 <a:solidFill>
                   <a:srgbClr val="000000"/>
                 </a:solidFill>
@@ -34402,14 +34136,14 @@
           <a:noFill/>
           <a:extLst>
             <a:ext uri="{909E8E84-426E-40dd-AFC4-6F175D3DCCD1}">
-              <a14:hiddenFill xmlns="" xmlns:a14="http://schemas.microsoft.com/office/drawing/2010/main">
+              <a14:hiddenFill xmlns:a14="http://schemas.microsoft.com/office/drawing/2010/main" xmlns="">
                 <a:solidFill>
                   <a:srgbClr val="FFFFFF"/>
                 </a:solidFill>
               </a14:hiddenFill>
             </a:ext>
             <a:ext uri="{91240B29-F687-4f45-9708-019B960494DF}">
-              <a14:hiddenLine xmlns="" xmlns:a14="http://schemas.microsoft.com/office/drawing/2010/main" w="9525">
+              <a14:hiddenLine xmlns:a14="http://schemas.microsoft.com/office/drawing/2010/main" xmlns="" w="9525">
                 <a:solidFill>
                   <a:srgbClr val="000000"/>
                 </a:solidFill>
@@ -34915,14 +34649,14 @@
           <a:noFill/>
           <a:extLst>
             <a:ext uri="{909E8E84-426E-40dd-AFC4-6F175D3DCCD1}">
-              <a14:hiddenFill xmlns="" xmlns:a14="http://schemas.microsoft.com/office/drawing/2010/main">
+              <a14:hiddenFill xmlns:a14="http://schemas.microsoft.com/office/drawing/2010/main" xmlns="">
                 <a:solidFill>
                   <a:srgbClr val="FFFFFF"/>
                 </a:solidFill>
               </a14:hiddenFill>
             </a:ext>
             <a:ext uri="{91240B29-F687-4f45-9708-019B960494DF}">
-              <a14:hiddenLine xmlns="" xmlns:a14="http://schemas.microsoft.com/office/drawing/2010/main" w="9525">
+              <a14:hiddenLine xmlns:a14="http://schemas.microsoft.com/office/drawing/2010/main" xmlns="" w="9525">
                 <a:solidFill>
                   <a:srgbClr val="000000"/>
                 </a:solidFill>
@@ -35456,14 +35190,14 @@
           <a:noFill/>
           <a:extLst>
             <a:ext uri="{909E8E84-426E-40dd-AFC4-6F175D3DCCD1}">
-              <a14:hiddenFill xmlns="" xmlns:a14="http://schemas.microsoft.com/office/drawing/2010/main">
+              <a14:hiddenFill xmlns:a14="http://schemas.microsoft.com/office/drawing/2010/main" xmlns="">
                 <a:solidFill>
                   <a:srgbClr val="FFFFFF"/>
                 </a:solidFill>
               </a14:hiddenFill>
             </a:ext>
             <a:ext uri="{91240B29-F687-4f45-9708-019B960494DF}">
-              <a14:hiddenLine xmlns="" xmlns:a14="http://schemas.microsoft.com/office/drawing/2010/main" w="9525">
+              <a14:hiddenLine xmlns:a14="http://schemas.microsoft.com/office/drawing/2010/main" xmlns="" w="9525">
                 <a:solidFill>
                   <a:srgbClr val="000000"/>
                 </a:solidFill>
@@ -35997,14 +35731,14 @@
           <a:noFill/>
           <a:extLst>
             <a:ext uri="{909E8E84-426E-40dd-AFC4-6F175D3DCCD1}">
-              <a14:hiddenFill xmlns="" xmlns:a14="http://schemas.microsoft.com/office/drawing/2010/main">
+              <a14:hiddenFill xmlns:a14="http://schemas.microsoft.com/office/drawing/2010/main" xmlns="">
                 <a:solidFill>
                   <a:srgbClr val="FFFFFF"/>
                 </a:solidFill>
               </a14:hiddenFill>
             </a:ext>
             <a:ext uri="{91240B29-F687-4f45-9708-019B960494DF}">
-              <a14:hiddenLine xmlns="" xmlns:a14="http://schemas.microsoft.com/office/drawing/2010/main" w="9525">
+              <a14:hiddenLine xmlns:a14="http://schemas.microsoft.com/office/drawing/2010/main" xmlns="" w="9525">
                 <a:solidFill>
                   <a:srgbClr val="000000"/>
                 </a:solidFill>
@@ -36652,14 +36386,14 @@
           <a:noFill/>
           <a:extLst>
             <a:ext uri="{909E8E84-426E-40dd-AFC4-6F175D3DCCD1}">
-              <a14:hiddenFill xmlns="" xmlns:a14="http://schemas.microsoft.com/office/drawing/2010/main">
+              <a14:hiddenFill xmlns:a14="http://schemas.microsoft.com/office/drawing/2010/main" xmlns="">
                 <a:solidFill>
                   <a:srgbClr val="FFFFFF"/>
                 </a:solidFill>
               </a14:hiddenFill>
             </a:ext>
             <a:ext uri="{91240B29-F687-4f45-9708-019B960494DF}">
-              <a14:hiddenLine xmlns="" xmlns:a14="http://schemas.microsoft.com/office/drawing/2010/main" w="9525">
+              <a14:hiddenLine xmlns:a14="http://schemas.microsoft.com/office/drawing/2010/main" xmlns="" w="9525">
                 <a:solidFill>
                   <a:srgbClr val="000000"/>
                 </a:solidFill>
@@ -37597,14 +37331,14 @@
           <a:noFill/>
           <a:extLst>
             <a:ext uri="{909E8E84-426E-40dd-AFC4-6F175D3DCCD1}">
-              <a14:hiddenFill xmlns="" xmlns:a14="http://schemas.microsoft.com/office/drawing/2010/main">
+              <a14:hiddenFill xmlns:a14="http://schemas.microsoft.com/office/drawing/2010/main" xmlns="">
                 <a:solidFill>
                   <a:srgbClr val="FFFFFF"/>
                 </a:solidFill>
               </a14:hiddenFill>
             </a:ext>
             <a:ext uri="{91240B29-F687-4f45-9708-019B960494DF}">
-              <a14:hiddenLine xmlns="" xmlns:a14="http://schemas.microsoft.com/office/drawing/2010/main" w="9525">
+              <a14:hiddenLine xmlns:a14="http://schemas.microsoft.com/office/drawing/2010/main" xmlns="" w="9525">
                 <a:solidFill>
                   <a:srgbClr val="000000"/>
                 </a:solidFill>
@@ -38252,14 +37986,14 @@
           <a:noFill/>
           <a:extLst>
             <a:ext uri="{909E8E84-426E-40dd-AFC4-6F175D3DCCD1}">
-              <a14:hiddenFill xmlns="" xmlns:a14="http://schemas.microsoft.com/office/drawing/2010/main">
+              <a14:hiddenFill xmlns:a14="http://schemas.microsoft.com/office/drawing/2010/main" xmlns="">
                 <a:solidFill>
                   <a:srgbClr val="FFFFFF"/>
                 </a:solidFill>
               </a14:hiddenFill>
             </a:ext>
             <a:ext uri="{91240B29-F687-4f45-9708-019B960494DF}">
-              <a14:hiddenLine xmlns="" xmlns:a14="http://schemas.microsoft.com/office/drawing/2010/main" w="9525">
+              <a14:hiddenLine xmlns:a14="http://schemas.microsoft.com/office/drawing/2010/main" xmlns="" w="9525">
                 <a:solidFill>
                   <a:srgbClr val="000000"/>
                 </a:solidFill>
